--- a/docs/ipro-meeting-prep.pptx
+++ b/docs/ipro-meeting-prep.pptx
@@ -2600,7 +2600,7 @@
                 <a:ea typeface="Yu Gothic" pitchFamily="34" charset="-122"/>
                 <a:cs typeface="Yu Gothic" pitchFamily="34" charset="-120"/>
               </a:rPr>
-              <a:t>2026-07-31</a:t>
+              <a:t>2026-07-31（実装更新 2026-08-06）</a:t>
             </a:r>
             <a:endParaRPr lang="en-US" sz="1350" dirty="0"/>
           </a:p>
@@ -5096,6 +5096,10 @@
           </a:solidFill>
           <a:ln/>
         </p:spPr>
+        <p:txBody>
+          <a:bodyPr/>
+          <a:p/>
+        </p:txBody>
       </p:sp>
       <p:sp>
         <p:nvSpPr>
@@ -5201,6 +5205,10 @@
             <a:prstDash val="solid"/>
           </a:ln>
         </p:spPr>
+        <p:txBody>
+          <a:bodyPr/>
+          <a:p/>
+        </p:txBody>
       </p:sp>
       <p:sp>
         <p:nvSpPr>
@@ -5345,6 +5353,10 @@
             <a:prstDash val="solid"/>
           </a:ln>
         </p:spPr>
+        <p:txBody>
+          <a:bodyPr/>
+          <a:p/>
+        </p:txBody>
       </p:sp>
       <p:sp>
         <p:nvSpPr>
@@ -5489,6 +5501,10 @@
             <a:prstDash val="solid"/>
           </a:ln>
         </p:spPr>
+        <p:txBody>
+          <a:bodyPr/>
+          <a:p/>
+        </p:txBody>
       </p:sp>
       <p:sp>
         <p:nvSpPr>
@@ -5633,6 +5649,10 @@
             <a:prstDash val="solid"/>
           </a:ln>
         </p:spPr>
+        <p:txBody>
+          <a:bodyPr/>
+          <a:p/>
+        </p:txBody>
       </p:sp>
       <p:sp>
         <p:nvSpPr>
@@ -5777,6 +5797,10 @@
             <a:prstDash val="solid"/>
           </a:ln>
         </p:spPr>
+        <p:txBody>
+          <a:bodyPr/>
+          <a:p/>
+        </p:txBody>
       </p:sp>
       <p:sp>
         <p:nvSpPr>
@@ -5889,7 +5913,7 @@
                 <a:ea typeface="Yu Gothic" pitchFamily="34" charset="-122"/>
                 <a:cs typeface="Yu Gothic" pitchFamily="34" charset="-120"/>
               </a:rPr>
-              <a:t>COMP=JPEG の解像度・fps は何で決まるか。INTERNETMODE=ON の意味。START が 204 を返す条件。</a:t>
+              <a:t>COMP=JPEG が JPEG 非対応カメラに 39×37 のプレースホルダを 200 で返すのは仕様か。事前に判別する手段はあるか（当社は H.265/H.264 受信へ移行して解消）。COMP=H265/H264 の 1 パート = RTP 1 個という理解で正しいか。INTERNETMODE=ON の意味。</a:t>
             </a:r>
             <a:endParaRPr lang="en-US" sz="950" dirty="0"/>
           </a:p>
@@ -5921,6 +5945,10 @@
             <a:prstDash val="solid"/>
           </a:ln>
         </p:spPr>
+        <p:txBody>
+          <a:bodyPr/>
+          <a:p/>
+        </p:txBody>
       </p:sp>
       <p:sp>
         <p:nvSpPr>
@@ -6065,6 +6093,10 @@
             <a:prstDash val="solid"/>
           </a:ln>
         </p:spPr>
+        <p:txBody>
+          <a:bodyPr/>
+          <a:p/>
+        </p:txBody>
       </p:sp>
       <p:sp>
         <p:nvSpPr>
@@ -6209,6 +6241,10 @@
             <a:prstDash val="solid"/>
           </a:ln>
         </p:spPr>
+        <p:txBody>
+          <a:bodyPr/>
+          <a:p/>
+        </p:txBody>
       </p:sp>
       <p:sp>
         <p:nvSpPr>
@@ -10316,7 +10352,7 @@
                           <a:ea typeface="Yu Gothic" pitchFamily="34" charset="-122"/>
                           <a:cs typeface="Yu Gothic" pitchFamily="34" charset="-120"/>
                         </a:rPr>
-                        <a:t>（グリッド / 単画面・低 fps JPEG）</a:t>
+                        <a:t>（グリッド / 単画面・低 fps）</a:t>
                       </a:r>
                       <a:endParaRPr lang="en-US" sz="1050" dirty="0">
                         <a:latin typeface="Yu Gothic" charset="0"/>
@@ -10405,7 +10441,7 @@
                           <a:ea typeface="Courier New" pitchFamily="34" charset="-122"/>
                           <a:cs typeface="Courier New" pitchFamily="34" charset="-120"/>
                         </a:rPr>
-                        <a:t>(COMP=JPEG, multipart MJPEG)</a:t>
+                        <a:t>(COMP=H265 / H264, multipart RTP)</a:t>
                       </a:r>
                       <a:endParaRPr lang="en-US" sz="950" dirty="0">
                         <a:latin typeface="Courier New" charset="0"/>
@@ -10494,7 +10530,7 @@
                           <a:ea typeface="Yu Gothic" pitchFamily="34" charset="-122"/>
                           <a:cs typeface="Yu Gothic" pitchFamily="34" charset="-120"/>
                         </a:rPr>
-                        <a:t>push.cgi はカメラごとに 1 本だけ開いて常時受信し最新フレームをキャッシュ（毎回 START/STOP するとセッション枯渇で 204）。事前に hdrctl.cgi?SCREEN=1X。UID は NVR 1 台 = 1 つを全カメラで共有し、status.cgi を 60 秒間隔で keepalive。</a:t>
+                        <a:t>push.cgi はカメラごとに 1 本だけ開いて常時受信（毎回 START/STOP するとセッション枯渇で 204）。事前に hdrctl.cgi?SCREEN=1X。UID は NVR 1 台 = 1 つを全カメラで共有し status.cgi で keepalive。2026-08-06 に COMP=JPEG から H.265/H.264 へ変更し、受信 RTP を再構成してエッジでデコードする方式にした。</a:t>
                       </a:r>
                       <a:endParaRPr lang="en-US" sz="1000" dirty="0">
                         <a:latin typeface="Yu Gothic" charset="0"/>
@@ -10742,7 +10778,7 @@
                           <a:ea typeface="Yu Gothic" pitchFamily="34" charset="-122"/>
                           <a:cs typeface="Yu Gothic" pitchFamily="34" charset="-120"/>
                         </a:rPr>
-                        <a:t>RTSP URL は静的に組まず ONVIF で取得（NU 配下カメラは rtsp://&lt;ip&gt;/ONVIF/MediaInput?profile=… の動的形式）。go2rtc 経由で HLS 配信。H.265 はエッジで H.264 に変換。NVR 経由の高画質ライブは未使用。</a:t>
+                        <a:t>RTSP URL は静的に組まず ONVIF で取得（NU 配下カメラは rtsp://&lt;ip&gt;/ONVIF/MediaInput?profile=… の動的形式）。go2rtc 経由で HLS 配信。H.265 はエッジで H.264 に変換。NVR 経由では提供しない — NU101 は RTSP(554) が閉じており go2rtc に載せる手段が無いため。</a:t>
                       </a:r>
                       <a:endParaRPr lang="en-US" sz="1000" dirty="0">
                         <a:latin typeface="Yu Gothic" charset="0"/>
@@ -12616,6 +12652,10 @@
           </a:solidFill>
           <a:ln/>
         </p:spPr>
+        <p:txBody>
+          <a:bodyPr/>
+          <a:p/>
+        </p:txBody>
       </p:sp>
       <p:sp>
         <p:nvSpPr>
@@ -12721,6 +12761,10 @@
             <a:prstDash val="solid"/>
           </a:ln>
         </p:spPr>
+        <p:txBody>
+          <a:bodyPr/>
+          <a:p/>
+        </p:txBody>
       </p:sp>
       <p:sp>
         <p:nvSpPr>
@@ -12826,6 +12870,10 @@
             <a:prstDash val="solid"/>
           </a:ln>
         </p:spPr>
+        <p:txBody>
+          <a:bodyPr/>
+          <a:p/>
+        </p:txBody>
       </p:sp>
       <p:sp>
         <p:nvSpPr>
@@ -12931,6 +12979,10 @@
             <a:prstDash val="solid"/>
           </a:ln>
         </p:spPr>
+        <p:txBody>
+          <a:bodyPr/>
+          <a:p/>
+        </p:txBody>
       </p:sp>
       <p:sp>
         <p:nvSpPr>
@@ -13036,6 +13088,10 @@
             <a:prstDash val="solid"/>
           </a:ln>
         </p:spPr>
+        <p:txBody>
+          <a:bodyPr/>
+          <a:p/>
+        </p:txBody>
       </p:sp>
       <p:sp>
         <p:nvSpPr>
@@ -13109,7 +13165,7 @@
                 <a:ea typeface="Yu Gothic" pitchFamily="34" charset="-122"/>
                 <a:cs typeface="Yu Gothic" pitchFamily="34" charset="-120"/>
               </a:rPr>
-              <a:t>ライブ・静止画 = カメラ直 ONVIF、録画 = NVR の httpdl.cgi。この分担が当社の標準構成。</a:t>
+              <a:t>ライブ・静止画 = カメラ直 ONVIF、録画 = NVR の httpdl.cgi。カメラ網が分離された店舗は NVR 経由のみでも成立（2026-08-06）。</a:t>
             </a:r>
             <a:endParaRPr lang="en-US" sz="1150" dirty="0"/>
           </a:p>
@@ -13141,6 +13197,10 @@
             <a:prstDash val="solid"/>
           </a:ln>
         </p:spPr>
+        <p:txBody>
+          <a:bodyPr/>
+          <a:p/>
+        </p:txBody>
       </p:sp>
       <p:sp>
         <p:nvSpPr>
@@ -14054,7 +14114,7 @@
                           <a:ea typeface="Yu Gothic" pitchFamily="34" charset="-122"/>
                           <a:cs typeface="Yu Gothic" pitchFamily="34" charset="-120"/>
                         </a:rPr>
-                        <a:t>push.cgi を短時間に START/STOP 連打するとセッション飽和 → 以後 START が 204（空応答）</a:t>
+                        <a:t>COMP=JPEG は JPEG 配信を持たないカメラに 39×37 のプレースホルダを HTTP 200 で返す（エラーにならない）。また START/STOP 連打でセッション飽和 → 以後 START が 204（空応答）</a:t>
                       </a:r>
                       <a:endParaRPr lang="en-US" sz="1000" dirty="0">
                         <a:latin typeface="Yu Gothic" charset="0"/>
@@ -14122,7 +14182,7 @@
                           <a:ea typeface="Yu Gothic" pitchFamily="34" charset="-122"/>
                           <a:cs typeface="Yu Gothic" pitchFamily="34" charset="-120"/>
                         </a:rPr>
-                        <a:t>カメラごとに 1 本を開きっぱなしにする永続ストリーム方式で解決</a:t>
+                        <a:t>COMP=H265/H264 を受けエッジでデコードする方式へ移行（1 パート = RTP 1 個・PT 98/101）。カメラ側の配信設定に非依存になった。204 は永続ストリーム方式で回避</a:t>
                       </a:r>
                       <a:endParaRPr lang="en-US" sz="1000" dirty="0">
                         <a:latin typeface="Yu Gothic" charset="0"/>
@@ -14190,7 +14250,7 @@
                           <a:ea typeface="Yu Gothic" pitchFamily="34" charset="-122"/>
                           <a:cs typeface="Yu Gothic" pitchFamily="34" charset="-120"/>
                         </a:rPr>
-                        <a:t>Q11 204 の条件</a:t>
+                        <a:t>Q11 仕様か・判別法</a:t>
                       </a:r>
                       <a:endParaRPr lang="en-US" sz="1000" dirty="0">
                         <a:latin typeface="Yu Gothic" charset="0"/>
